--- a/환경경제학/2026-1/환경경제학_Chapter_06.pptx
+++ b/환경경제학/2026-1/환경경제학_Chapter_06.pptx
@@ -223,7 +223,7 @@
           <a:p>
             <a:fld id="{4A5E00EF-AEA4-43E2-9451-8F9C59A39471}" type="datetimeFigureOut">
               <a:rPr lang="ko-KR" altLang="en-US" smtClean="0"/>
-              <a:t>2026-09-30</a:t>
+              <a:t>2026-10-01</a:t>
             </a:fld>
             <a:endParaRPr lang="ko-KR" altLang="en-US"/>
           </a:p>
@@ -645,7 +645,7 @@
           <a:p>
             <a:fld id="{CD32C56F-BD27-4999-9E6D-D4EACE3DA9F4}" type="datetime1">
               <a:rPr lang="ko-KR" altLang="en-US" smtClean="0"/>
-              <a:t>2026-09-30</a:t>
+              <a:t>2026-10-01</a:t>
             </a:fld>
             <a:endParaRPr lang="ko-KR" altLang="en-US"/>
           </a:p>
@@ -859,7 +859,7 @@
           <a:p>
             <a:fld id="{8EF4A19C-72C8-45CA-8E3F-68A7FA345D6C}" type="datetime1">
               <a:rPr lang="ko-KR" altLang="en-US" smtClean="0"/>
-              <a:t>2026-09-30</a:t>
+              <a:t>2026-10-01</a:t>
             </a:fld>
             <a:endParaRPr lang="ko-KR" altLang="en-US"/>
           </a:p>
@@ -1083,7 +1083,7 @@
           <a:p>
             <a:fld id="{56A175B2-010B-4341-954C-5F8F5C70B124}" type="datetime1">
               <a:rPr lang="ko-KR" altLang="en-US" smtClean="0"/>
-              <a:t>2026-09-30</a:t>
+              <a:t>2026-10-01</a:t>
             </a:fld>
             <a:endParaRPr lang="ko-KR" altLang="en-US"/>
           </a:p>
@@ -1297,7 +1297,7 @@
           <a:p>
             <a:fld id="{16B83F9E-22C9-45CA-9E85-070F1D3EF530}" type="datetime1">
               <a:rPr lang="ko-KR" altLang="en-US" smtClean="0"/>
-              <a:t>2026-09-30</a:t>
+              <a:t>2026-10-01</a:t>
             </a:fld>
             <a:endParaRPr lang="ko-KR" altLang="en-US"/>
           </a:p>
@@ -1588,7 +1588,7 @@
           <a:p>
             <a:fld id="{03278F45-FB3C-4C4D-B89A-7BC3F5F229F6}" type="datetime1">
               <a:rPr lang="ko-KR" altLang="en-US" smtClean="0"/>
-              <a:t>2026-09-30</a:t>
+              <a:t>2026-10-01</a:t>
             </a:fld>
             <a:endParaRPr lang="ko-KR" altLang="en-US"/>
           </a:p>
@@ -1981,7 +1981,7 @@
           <a:p>
             <a:fld id="{38FDAC3C-35A6-415C-9F03-738A6AC328B1}" type="datetime1">
               <a:rPr lang="ko-KR" altLang="en-US" smtClean="0"/>
-              <a:t>2026-09-30</a:t>
+              <a:t>2026-10-01</a:t>
             </a:fld>
             <a:endParaRPr lang="ko-KR" altLang="en-US"/>
           </a:p>
@@ -3575,7 +3575,7 @@
           <a:p>
             <a:fld id="{507A0DF1-AEE6-4B0D-89D2-351E7B3EF65C}" type="datetime1">
               <a:rPr lang="ko-KR" altLang="en-US" smtClean="0"/>
-              <a:t>2026-09-30</a:t>
+              <a:t>2026-10-01</a:t>
             </a:fld>
             <a:endParaRPr lang="ko-KR" altLang="en-US"/>
           </a:p>
@@ -4003,7 +4003,7 @@
           <a:p>
             <a:fld id="{CA93B8C9-630F-4D57-944D-04FD37CECCD3}" type="datetime1">
               <a:rPr lang="ko-KR" altLang="en-US" smtClean="0"/>
-              <a:t>2026-09-30</a:t>
+              <a:t>2026-10-01</a:t>
             </a:fld>
             <a:endParaRPr lang="ko-KR" altLang="en-US"/>
           </a:p>
@@ -4160,7 +4160,7 @@
           <a:p>
             <a:fld id="{E986165A-AC43-4902-9541-874ECD310BA3}" type="datetime1">
               <a:rPr lang="ko-KR" altLang="en-US" smtClean="0"/>
-              <a:t>2026-09-30</a:t>
+              <a:t>2026-10-01</a:t>
             </a:fld>
             <a:endParaRPr lang="ko-KR" altLang="en-US"/>
           </a:p>
@@ -4487,7 +4487,7 @@
           <a:p>
             <a:fld id="{47E6EE6D-2B0E-43A9-87A2-7354CDB998F4}" type="datetime1">
               <a:rPr lang="ko-KR" altLang="en-US" smtClean="0"/>
-              <a:t>2026-09-30</a:t>
+              <a:t>2026-10-01</a:t>
             </a:fld>
             <a:endParaRPr lang="ko-KR" altLang="en-US"/>
           </a:p>
@@ -4791,7 +4791,7 @@
           <a:p>
             <a:fld id="{5CC5944E-0BC8-4FAA-9F94-6B4B05834E10}" type="datetime1">
               <a:rPr lang="ko-KR" altLang="en-US" smtClean="0"/>
-              <a:t>2026-09-30</a:t>
+              <a:t>2026-10-01</a:t>
             </a:fld>
             <a:endParaRPr lang="ko-KR" altLang="en-US"/>
           </a:p>
@@ -9580,7 +9580,7 @@
         <p:spPr>
           <a:xfrm>
             <a:off x="678873" y="958844"/>
-            <a:ext cx="7109325" cy="4107343"/>
+            <a:ext cx="7109325" cy="3738011"/>
           </a:xfrm>
           <a:prstGeom prst="rect">
             <a:avLst/>
@@ -9625,10 +9625,17 @@
               <a:buChar char="•"/>
             </a:pPr>
             <a:r>
-              <a:rPr lang="ko-KR" altLang="en-US" sz="1600" spc="-50" dirty="0"/>
-              <a:t>정부가 필요 이상으로 강한 환경기준을 설정하면 오염원은 기술혁신에 힘쓰게 됨</a:t>
-            </a:r>
-            <a:endParaRPr lang="en-US" altLang="ko-KR" sz="1600" spc="-50" dirty="0"/>
+              <a:rPr lang="ko-KR" altLang="en-US" sz="1600" spc="-50"/>
+              <a:t>정부가 보다 </a:t>
+            </a:r>
+            <a:r>
+              <a:rPr lang="ko-KR" altLang="en-US" sz="1600" spc="-50" dirty="0"/>
+              <a:t>강한 환경기준을 설정하면 오염원은 기술혁신에 힘쓰게 된다</a:t>
+            </a:r>
+            <a:r>
+              <a:rPr lang="en-US" altLang="ko-KR" sz="1600" spc="-50" dirty="0"/>
+              <a:t>.</a:t>
+            </a:r>
           </a:p>
           <a:p>
             <a:pPr marL="835025" lvl="1" indent="-285750">
